--- a/slides/module_4_integrated_challenge.pptx
+++ b/slides/module_4_integrated_challenge.pptx
@@ -453,7 +453,7 @@
           <a:lstStyle xmlns:a="http://schemas.openxmlformats.org/drawingml/2006/main"/>
           <a:p xmlns:a="http://schemas.openxmlformats.org/drawingml/2006/main">
             <a:r>
-              <a:t>[Tiempo: 5 min]</a:t>
+              <a:t>[Tiempo: 2 min]</a:t>
             </a:r>
           </a:p>
           <a:p xmlns:a="http://schemas.openxmlformats.org/drawingml/2006/main">
@@ -533,7 +533,7 @@
           </a:p>
           <a:p xmlns:a="http://schemas.openxmlformats.org/drawingml/2006/main">
             <a:r>
-              <a:t>Use instructor/exit_ticket.md; solución y criterios en instructor/exit_ticket_solution.md. Trabajo individual, sin IA, 15 minutos.</a:t>
+              <a:t>Use instructor/exit_ticket.md; solución y criterios en instructor/exit_ticket_solution.md. Trabajo individual, sin IA, 15 minutos. Entregue handouts/case_C.csv: un caso que ningún equipo ha analizado.</a:t>
             </a:r>
           </a:p>
         </p:txBody>
@@ -603,7 +603,7 @@
           <a:lstStyle xmlns:a="http://schemas.openxmlformats.org/drawingml/2006/main"/>
           <a:p xmlns:a="http://schemas.openxmlformats.org/drawingml/2006/main">
             <a:r>
-              <a:t>[Tiempo: 5 min]</a:t>
+              <a:t>[Tiempo: 3 min]</a:t>
             </a:r>
           </a:p>
           <a:p xmlns:a="http://schemas.openxmlformats.org/drawingml/2006/main">
@@ -753,12 +753,12 @@
           <a:lstStyle xmlns:a="http://schemas.openxmlformats.org/drawingml/2006/main"/>
           <a:p xmlns:a="http://schemas.openxmlformats.org/drawingml/2006/main">
             <a:r>
-              <a:t>[Tiempo: 5 min]</a:t>
-            </a:r>
-          </a:p>
-          <a:p xmlns:a="http://schemas.openxmlformats.org/drawingml/2006/main">
-            <a:r>
-              <a:t>Archivos data/case_A.csv y data/case_B.csv. Clave solo en instructor/challenge_key.json. No revelar etiquetas hasta el debrief.</a:t>
+              <a:t>[Tiempo: 4 min]</a:t>
+            </a:r>
+          </a:p>
+          <a:p xmlns:a="http://schemas.openxmlformats.org/drawingml/2006/main">
+            <a:r>
+              <a:t>Entregue handouts/case_A.csv o handouts/case_B.csv, uno por pareja, al empezar el módulo. Clave solo en instructor/challenge_key.json. No revelar etiquetas hasta el debrief.</a:t>
             </a:r>
           </a:p>
         </p:txBody>
@@ -828,7 +828,7 @@
           <a:lstStyle xmlns:a="http://schemas.openxmlformats.org/drawingml/2006/main"/>
           <a:p xmlns:a="http://schemas.openxmlformats.org/drawingml/2006/main">
             <a:r>
-              <a:t>[Tiempo: 7 min]</a:t>
+              <a:t>[Tiempo: 4 min]</a:t>
             </a:r>
           </a:p>
           <a:p xmlns:a="http://schemas.openxmlformats.org/drawingml/2006/main">
@@ -903,7 +903,7 @@
           <a:lstStyle xmlns:a="http://schemas.openxmlformats.org/drawingml/2006/main"/>
           <a:p xmlns:a="http://schemas.openxmlformats.org/drawingml/2006/main">
             <a:r>
-              <a:t>[Tiempo: 7 min]</a:t>
+              <a:t>[Tiempo: 5 min]</a:t>
             </a:r>
           </a:p>
           <a:p xmlns:a="http://schemas.openxmlformats.org/drawingml/2006/main">
@@ -978,7 +978,7 @@
           <a:lstStyle xmlns:a="http://schemas.openxmlformats.org/drawingml/2006/main"/>
           <a:p xmlns:a="http://schemas.openxmlformats.org/drawingml/2006/main">
             <a:r>
-              <a:t>[Tiempo: 8 min]</a:t>
+              <a:t>[Tiempo: 5 min]</a:t>
             </a:r>
           </a:p>
           <a:p xmlns:a="http://schemas.openxmlformats.org/drawingml/2006/main">
@@ -1053,7 +1053,7 @@
           <a:lstStyle xmlns:a="http://schemas.openxmlformats.org/drawingml/2006/main"/>
           <a:p xmlns:a="http://schemas.openxmlformats.org/drawingml/2006/main">
             <a:r>
-              <a:t>[Tiempo: 8 min]</a:t>
+              <a:t>[Tiempo: 5 min]</a:t>
             </a:r>
           </a:p>
           <a:p xmlns:a="http://schemas.openxmlformats.org/drawingml/2006/main">
@@ -1128,7 +1128,7 @@
           <a:lstStyle xmlns:a="http://schemas.openxmlformats.org/drawingml/2006/main"/>
           <a:p xmlns:a="http://schemas.openxmlformats.org/drawingml/2006/main">
             <a:r>
-              <a:t>[Tiempo: 35 min]</a:t>
+              <a:t>[Tiempo: 40 min]</a:t>
             </a:r>
           </a:p>
           <a:p xmlns:a="http://schemas.openxmlformats.org/drawingml/2006/main">
@@ -1278,12 +1278,12 @@
           <a:lstStyle xmlns:a="http://schemas.openxmlformats.org/drawingml/2006/main"/>
           <a:p xmlns:a="http://schemas.openxmlformats.org/drawingml/2006/main">
             <a:r>
-              <a:t>[Tiempo: 8 min]</a:t>
-            </a:r>
-          </a:p>
-          <a:p xmlns:a="http://schemas.openxmlformats.org/drawingml/2006/main">
-            <a:r>
-              <a:t>Seleccione algunas parejas. Una persona presenta; la otra responde una pregunta sobre verificación.</a:t>
+              <a:t>[Tiempo: 20 min]</a:t>
+            </a:r>
+          </a:p>
+          <a:p xmlns:a="http://schemas.openxmlformats.org/drawingml/2006/main">
+            <a:r>
+              <a:t>Con hasta 10 parejas defienden todas; con más, sortee 10 defensas (90 s más 30 s de cambio) y el resto entrega solo el informe. Una persona presenta; la otra responde una pregunta sobre verificación.</a:t>
             </a:r>
           </a:p>
         </p:txBody>
@@ -7123,7 +7123,7 @@
                 <a:ea typeface="Nimbus Sans"/>
                 <a:cs typeface="Nimbus Sans"/>
               </a:rPr>
-              <a:t>Máximo 2 páginas: pregunta, método, observaciones, conclusión, límites y prueba siguiente.</a:t>
+              <a:t>Una página: pregunta, método, observaciones, conclusión, límites y prueba siguiente.</a:t>
             </a:r>
           </a:p>
         </p:txBody>
@@ -12210,7 +12210,7 @@
                 <a:ea typeface="Nimbus Sans"/>
                 <a:cs typeface="Nimbus Sans"/>
               </a:rPr>
-              <a:t>Explore ambos casos y conserve un cálculo clave.</a:t>
+              <a:t>Explore su caso y conserve un cálculo clave.</a:t>
             </a:r>
           </a:p>
         </p:txBody>
@@ -12541,7 +12541,7 @@
                 <a:ea typeface="Nimbus Sans"/>
                 <a:cs typeface="Nimbus Sans"/>
               </a:rPr>
-              <a:t>35 min</a:t>
+              <a:t>40 min</a:t>
             </a:r>
           </a:p>
         </p:txBody>
